--- a/docs/reports/台灣產業趨勢監測週報_2026-10-05_2026-10-12.pptx
+++ b/docs/reports/台灣產業趨勢監測週報_2026-10-05_2026-10-12.pptx
@@ -156,10 +156,10 @@
                   <c:v>服務業</c:v>
                 </c:pt>
                 <c:pt idx="5">
+                  <c:v>醫療保健業</c:v>
+                </c:pt>
+                <c:pt idx="6">
                   <c:v>住宿及餐飲業</c:v>
-                </c:pt>
-                <c:pt idx="6">
-                  <c:v>醫療保健業</c:v>
                 </c:pt>
                 <c:pt idx="7">
                   <c:v>資通訊業</c:v>
@@ -183,37 +183,37 @@
                 <c:formatCode>General</c:formatCode>
                 <c:ptCount val="11"/>
                 <c:pt idx="0">
-                  <c:v>32</c:v>
+                  <c:v>34</c:v>
                 </c:pt>
                 <c:pt idx="1">
-                  <c:v>131</c:v>
+                  <c:v>153</c:v>
                 </c:pt>
                 <c:pt idx="2">
-                  <c:v>159</c:v>
+                  <c:v>182</c:v>
                 </c:pt>
                 <c:pt idx="3">
-                  <c:v>184</c:v>
+                  <c:v>194</c:v>
                 </c:pt>
                 <c:pt idx="4">
-                  <c:v>245</c:v>
+                  <c:v>263</c:v>
                 </c:pt>
                 <c:pt idx="5">
-                  <c:v>307</c:v>
+                  <c:v>320</c:v>
                 </c:pt>
                 <c:pt idx="6">
-                  <c:v>309</c:v>
+                  <c:v>328</c:v>
                 </c:pt>
                 <c:pt idx="7">
-                  <c:v>357</c:v>
+                  <c:v>380</c:v>
                 </c:pt>
                 <c:pt idx="8">
-                  <c:v>650</c:v>
+                  <c:v>679</c:v>
                 </c:pt>
                 <c:pt idx="9">
-                  <c:v>793</c:v>
+                  <c:v>829</c:v>
                 </c:pt>
                 <c:pt idx="10">
-                  <c:v>995</c:v>
+                  <c:v>1048</c:v>
                 </c:pt>
               </c:numCache>
             </c:numRef>
@@ -329,7 +329,7 @@
                 <c:formatCode>General</c:formatCode>
                 <c:ptCount val="7"/>
                 <c:pt idx="0">
-                  <c:v>21</c:v>
+                  <c:v>22</c:v>
                 </c:pt>
                 <c:pt idx="1">
                   <c:v>21</c:v>
@@ -538,10 +538,10 @@
                 <c:formatCode>General</c:formatCode>
                 <c:ptCount val="6"/>
                 <c:pt idx="0">
-                  <c:v>241</c:v>
+                  <c:v>248</c:v>
                 </c:pt>
                 <c:pt idx="1">
-                  <c:v>114</c:v>
+                  <c:v>118</c:v>
                 </c:pt>
                 <c:pt idx="2">
                   <c:v>46</c:v>
@@ -553,7 +553,7 @@
                   <c:v>39</c:v>
                 </c:pt>
                 <c:pt idx="5">
-                  <c:v>21</c:v>
+                  <c:v>22</c:v>
                 </c:pt>
               </c:numCache>
             </c:numRef>
@@ -3705,7 +3705,7 @@
           </a:p>
           <a:p>
             <a:r>
-              <a:t>產出:2026-10-12 14:52(台北時間)</a:t>
+              <a:t>產出:2026-10-12 19:58(台北時間)</a:t>
             </a:r>
           </a:p>
           <a:p>
@@ -3773,7 +3773,7 @@
               <a:defRPr sz="1600"/>
             </a:pPr>
             <a:r>
-              <a:t>本期共蒐集 8856 篇公開報導,可歸類 4162 篇</a:t>
+              <a:t>本期共蒐集 9342 篇公開報導,可歸類 4410 篇</a:t>
             </a:r>
           </a:p>
           <a:p>
@@ -3781,7 +3781,7 @@
               <a:defRPr sz="1600"/>
             </a:pPr>
             <a:r>
-              <a:t>高科技製造業:995 篇(佔可歸類 23.9%)</a:t>
+              <a:t>高科技製造業:1048 篇(佔可歸類 23.8%)</a:t>
             </a:r>
           </a:p>
           <a:p>
@@ -3789,7 +3789,7 @@
               <a:defRPr sz="1600"/>
             </a:pPr>
             <a:r>
-              <a:t>政府教育單位:793 篇(佔可歸類 19.1%)</a:t>
+              <a:t>政府教育單位:829 篇(佔可歸類 18.8%)</a:t>
             </a:r>
           </a:p>
           <a:p>
@@ -3797,7 +3797,7 @@
               <a:defRPr sz="1600"/>
             </a:pPr>
             <a:r>
-              <a:t>金融業:650 篇(佔可歸類 15.6%)</a:t>
+              <a:t>金融業:679 篇(佔可歸類 15.4%)</a:t>
             </a:r>
           </a:p>
           <a:p>
@@ -3805,7 +3805,7 @@
               <a:defRPr sz="1600"/>
             </a:pPr>
             <a:r>
-              <a:t>最熱主題:AI 與自動化(944 篇)、利率與資金環境(266 篇)、地緣政治與供應鏈(212 篇)</a:t>
+              <a:t>最熱主題:AI 與自動化(990 篇)、利率與資金環境(284 篇)、地緣政治與供應鏈(222 篇)</a:t>
             </a:r>
           </a:p>
           <a:p>
@@ -3909,7 +3909,7 @@
           <a:lstStyle/>
           <a:p>
             <a:r>
-              <a:t>競品聲量對比(SOV)— 電腦品牌(合計 84 篇)</a:t>
+              <a:t>競品聲量對比(SOV)— 電腦品牌(合計 85 篇)</a:t>
             </a:r>
           </a:p>
         </p:txBody>
@@ -3966,7 +3966,7 @@
           <a:lstStyle/>
           <a:p>
             <a:r>
-              <a:t>競品聲量對比(SOV)— 半導體(合計 503 篇)</a:t>
+              <a:t>競品聲量對比(SOV)— 半導體(合計 515 篇)</a:t>
             </a:r>
           </a:p>
         </p:txBody>
@@ -4055,7 +4055,7 @@
               <a:defRPr sz="1600"/>
             </a:pPr>
             <a:r>
-              <a:t>遠傳:疑似負面 5 篇(命中:詐騙)</a:t>
+              <a:t>Meta:疑似負面 6 篇(命中:下架、弊案、抵制、掏空)</a:t>
             </a:r>
           </a:p>
           <a:p>
@@ -4063,7 +4063,7 @@
               <a:defRPr sz="1600"/>
             </a:pPr>
             <a:r>
-              <a:t>Meta:疑似負面 5 篇(命中:下架、抵制、掏空、起訴)</a:t>
+              <a:t>遠傳:疑似負面 5 篇(命中:詐騙)</a:t>
             </a:r>
           </a:p>
           <a:p>
@@ -4095,7 +4095,7 @@
               <a:defRPr sz="1600"/>
             </a:pPr>
             <a:r>
-              <a:t>成大:疑似負面 2 篇(命中:爆炸、資安事件)</a:t>
+              <a:t>台泥:疑似負面 2 篇(命中:背信、起訴)</a:t>
             </a:r>
           </a:p>
           <a:p>
@@ -4103,7 +4103,7 @@
               <a:defRPr sz="1600"/>
             </a:pPr>
             <a:r>
-              <a:t>輝達:疑似負面 2 篇(命中:缺陷、罷工)</a:t>
+              <a:t>成大:疑似負面 2 篇(命中:爆炸、資安事件)</a:t>
             </a:r>
           </a:p>
           <a:p>

--- a/docs/reports/台灣產業趨勢監測週報_2026-10-05_2026-10-12.pptx
+++ b/docs/reports/台灣產業趨勢監測週報_2026-10-05_2026-10-12.pptx
@@ -186,34 +186,34 @@
                   <c:v>34</c:v>
                 </c:pt>
                 <c:pt idx="1">
-                  <c:v>153</c:v>
+                  <c:v>162</c:v>
                 </c:pt>
                 <c:pt idx="2">
-                  <c:v>182</c:v>
+                  <c:v>190</c:v>
                 </c:pt>
                 <c:pt idx="3">
-                  <c:v>194</c:v>
+                  <c:v>199</c:v>
                 </c:pt>
                 <c:pt idx="4">
-                  <c:v>263</c:v>
+                  <c:v>275</c:v>
                 </c:pt>
                 <c:pt idx="5">
-                  <c:v>320</c:v>
+                  <c:v>324</c:v>
                 </c:pt>
                 <c:pt idx="6">
-                  <c:v>328</c:v>
+                  <c:v>333</c:v>
                 </c:pt>
                 <c:pt idx="7">
-                  <c:v>380</c:v>
+                  <c:v>392</c:v>
                 </c:pt>
                 <c:pt idx="8">
-                  <c:v>679</c:v>
+                  <c:v>689</c:v>
                 </c:pt>
                 <c:pt idx="9">
-                  <c:v>829</c:v>
+                  <c:v>846</c:v>
                 </c:pt>
                 <c:pt idx="10">
-                  <c:v>1048</c:v>
+                  <c:v>1073</c:v>
                 </c:pt>
               </c:numCache>
             </c:numRef>
@@ -335,7 +335,7 @@
                   <c:v>21</c:v>
                 </c:pt>
                 <c:pt idx="2">
-                  <c:v>12</c:v>
+                  <c:v>13</c:v>
                 </c:pt>
                 <c:pt idx="3">
                   <c:v>11</c:v>
@@ -538,22 +538,22 @@
                 <c:formatCode>General</c:formatCode>
                 <c:ptCount val="6"/>
                 <c:pt idx="0">
-                  <c:v>248</c:v>
+                  <c:v>251</c:v>
                 </c:pt>
                 <c:pt idx="1">
-                  <c:v>118</c:v>
+                  <c:v>122</c:v>
                 </c:pt>
                 <c:pt idx="2">
                   <c:v>46</c:v>
                 </c:pt>
                 <c:pt idx="3">
-                  <c:v>42</c:v>
+                  <c:v>43</c:v>
                 </c:pt>
                 <c:pt idx="4">
-                  <c:v>39</c:v>
+                  <c:v>40</c:v>
                 </c:pt>
                 <c:pt idx="5">
-                  <c:v>22</c:v>
+                  <c:v>24</c:v>
                 </c:pt>
               </c:numCache>
             </c:numRef>
@@ -3705,7 +3705,7 @@
           </a:p>
           <a:p>
             <a:r>
-              <a:t>產出:2026-10-12 19:58(台北時間)</a:t>
+              <a:t>產出:2026-10-12 21:33(台北時間)</a:t>
             </a:r>
           </a:p>
           <a:p>
@@ -3773,7 +3773,7 @@
               <a:defRPr sz="1600"/>
             </a:pPr>
             <a:r>
-              <a:t>本期共蒐集 9342 篇公開報導,可歸類 4410 篇</a:t>
+              <a:t>本期共蒐集 9548 篇公開報導,可歸類 4517 篇</a:t>
             </a:r>
           </a:p>
           <a:p>
@@ -3781,7 +3781,7 @@
               <a:defRPr sz="1600"/>
             </a:pPr>
             <a:r>
-              <a:t>高科技製造業:1048 篇(佔可歸類 23.8%)</a:t>
+              <a:t>高科技製造業:1073 篇(佔可歸類 23.8%)</a:t>
             </a:r>
           </a:p>
           <a:p>
@@ -3789,7 +3789,7 @@
               <a:defRPr sz="1600"/>
             </a:pPr>
             <a:r>
-              <a:t>政府教育單位:829 篇(佔可歸類 18.8%)</a:t>
+              <a:t>政府教育單位:846 篇(佔可歸類 18.7%)</a:t>
             </a:r>
           </a:p>
           <a:p>
@@ -3797,7 +3797,7 @@
               <a:defRPr sz="1600"/>
             </a:pPr>
             <a:r>
-              <a:t>金融業:679 篇(佔可歸類 15.4%)</a:t>
+              <a:t>金融業:689 篇(佔可歸類 15.3%)</a:t>
             </a:r>
           </a:p>
           <a:p>
@@ -3805,7 +3805,7 @@
               <a:defRPr sz="1600"/>
             </a:pPr>
             <a:r>
-              <a:t>最熱主題:AI 與自動化(990 篇)、利率與資金環境(284 篇)、地緣政治與供應鏈(222 篇)</a:t>
+              <a:t>最熱主題:AI 與自動化(1012 篇)、利率與資金環境(288 篇)、地緣政治與供應鏈(228 篇)</a:t>
             </a:r>
           </a:p>
           <a:p>
@@ -3909,7 +3909,7 @@
           <a:lstStyle/>
           <a:p>
             <a:r>
-              <a:t>競品聲量對比(SOV)— 電腦品牌(合計 85 篇)</a:t>
+              <a:t>競品聲量對比(SOV)— 電腦品牌(合計 86 篇)</a:t>
             </a:r>
           </a:p>
         </p:txBody>
@@ -3966,7 +3966,7 @@
           <a:lstStyle/>
           <a:p>
             <a:r>
-              <a:t>競品聲量對比(SOV)— 半導體(合計 515 篇)</a:t>
+              <a:t>競品聲量對比(SOV)— 半導體(合計 526 篇)</a:t>
             </a:r>
           </a:p>
         </p:txBody>
